--- a/site/public/slides/tts-day1-death-by-powerpoint.pptx
+++ b/site/public/slides/tts-day1-death-by-powerpoint.pptx
@@ -3162,73 +3162,47 @@
           <a:lstStyle/>
           <a:p>
             <a:r>
-              <a:rPr dirty="0"/>
               <a:t>TIMING</a:t>
             </a:r>
           </a:p>
           <a:p>
             <a:r>
-              <a:rPr dirty="0"/>
               <a:t>  0:10–0:14 (4 min)</a:t>
             </a:r>
           </a:p>
           <a:p>
             <a:r>
-              <a:rPr dirty="0"/>
               <a:t>SAY</a:t>
             </a:r>
           </a:p>
           <a:p>
             <a:r>
-              <a:rPr dirty="0"/>
-              <a:t>  One or two words each.</a:t>
-            </a:r>
-          </a:p>
-          <a:p>
-            <a:r>
-              <a:rPr dirty="0"/>
-              <a:t>  Read the cloud out. Let the laughter happen.</a:t>
-            </a:r>
-          </a:p>
-          <a:p>
-            <a:r>
-              <a:rPr dirty="0"/>
+              <a:t>  One or two words each. Read the answers out; let the laughter happen.</a:t>
+            </a:r>
+          </a:p>
+          <a:p>
+            <a:r>
+              <a:t>HOW TO RUN</a:t>
+            </a:r>
+          </a:p>
+          <a:p>
+            <a:r>
+              <a:t>  Menti word cloud: show Menti alongside this slide, or paste your own QR code and joining code onto it.</a:t>
+            </a:r>
+          </a:p>
+          <a:p>
+            <a:r>
+              <a:t>  No Menti, or no wifi? Shout-outs onto the whiteboard or a flipchart. The slide works either way.</a:t>
+            </a:r>
+          </a:p>
+          <a:p>
+            <a:r>
               <a:t>WHY</a:t>
             </a:r>
           </a:p>
           <a:p>
             <a:r>
-              <a:rPr dirty="0"/>
-              <a:t>  A 30-second retrieval test of an overloaded slide: feel the problem before the theory.</a:t>
-            </a:r>
-          </a:p>
-          <a:p>
-            <a:r>
-              <a:rPr dirty="0"/>
-              <a:t>FALLBACK</a:t>
-            </a:r>
-          </a:p>
-          <a:p>
-            <a:r>
-              <a:rPr dirty="0"/>
-              <a:t>  Shout-outs onto the whiteboard.</a:t>
-            </a:r>
-          </a:p>
-          <a:p>
-            <a:r>
-              <a:rPr dirty="0"/>
-              <a:t>IF SHORT</a:t>
-            </a:r>
-          </a:p>
-          <a:p>
-            <a:r>
-              <a:rPr dirty="0"/>
-              <a:t>  Skip Menti; go straight to shout-outs.</a:t>
-            </a:r>
-          </a:p>
-          <a:p>
-            <a:r>
-              <a:t>SETUP: create your own Menti word cloud and paste its QR code and joining code here.</a:t>
+              <a:t>  A 30-second retrieval test of an overloaded slide: they feel the problem before the theory.</a:t>
             </a:r>
           </a:p>
         </p:txBody>
@@ -14851,161 +14825,6 @@
           <a:chExt cx="0" cy="0"/>
         </a:xfrm>
       </p:grpSpPr>
-      <p:sp>
-        <p:nvSpPr>
-          <p:cNvPr id="2" name="TextBox 1"/>
-          <p:cNvSpPr txBox="1"/>
-          <p:nvPr/>
-        </p:nvSpPr>
-        <p:spPr>
-          <a:xfrm>
-            <a:off x="548640" y="411480"/>
-            <a:ext cx="10515600" cy="914400"/>
-          </a:xfrm>
-          <a:prstGeom prst="rect">
-            <a:avLst/>
-          </a:prstGeom>
-          <a:noFill/>
-        </p:spPr>
-        <p:txBody>
-          <a:bodyPr wrap="square" lIns="73152" rIns="73152" anchor="t">
-            <a:spAutoFit/>
-          </a:bodyPr>
-          <a:lstStyle/>
-          <a:p>
-            <a:pPr algn="l"/>
-            <a:r>
-              <a:rPr sz="4400" b="1">
-                <a:solidFill>
-                  <a:srgbClr val="4C4F69"/>
-                </a:solidFill>
-                <a:latin typeface="Georgia"/>
-              </a:rPr>
-              <a:t>What do you remember?</a:t>
-            </a:r>
-          </a:p>
-        </p:txBody>
-      </p:sp>
-      <p:sp>
-        <p:nvSpPr>
-          <p:cNvPr id="4" name="TextBox 3"/>
-          <p:cNvSpPr txBox="1"/>
-          <p:nvPr/>
-        </p:nvSpPr>
-        <p:spPr>
-          <a:xfrm>
-            <a:off x="7254239" y="2606040"/>
-            <a:ext cx="3713873" cy="769441"/>
-          </a:xfrm>
-          <a:prstGeom prst="rect">
-            <a:avLst/>
-          </a:prstGeom>
-          <a:noFill/>
-        </p:spPr>
-        <p:txBody>
-          <a:bodyPr wrap="square" lIns="73152" rIns="73152" anchor="t">
-            <a:spAutoFit/>
-          </a:bodyPr>
-          <a:lstStyle/>
-          <a:p>
-            <a:pPr algn="l"/>
-            <a:r>
-              <a:rPr sz="4400" b="1" dirty="0" err="1">
-                <a:solidFill>
-                  <a:srgbClr val="036D97"/>
-                </a:solidFill>
-                <a:latin typeface="Aptos"/>
-              </a:rPr>
-              <a:t>menti.com</a:t>
-            </a:r>
-            <a:endParaRPr sz="4400" b="1" dirty="0">
-              <a:solidFill>
-                <a:srgbClr val="036D97"/>
-              </a:solidFill>
-              <a:latin typeface="Aptos"/>
-            </a:endParaRPr>
-          </a:p>
-        </p:txBody>
-      </p:sp>
-      <p:sp>
-        <p:nvSpPr>
-          <p:cNvPr id="5" name="TextBox 4"/>
-          <p:cNvSpPr txBox="1"/>
-          <p:nvPr/>
-        </p:nvSpPr>
-        <p:spPr>
-          <a:xfrm>
-            <a:off x="7254239" y="3520440"/>
-            <a:ext cx="3713873" cy="646331"/>
-          </a:xfrm>
-          <a:prstGeom prst="rect">
-            <a:avLst/>
-          </a:prstGeom>
-          <a:noFill/>
-        </p:spPr>
-        <p:txBody>
-          <a:bodyPr wrap="square" lIns="73152" rIns="73152" anchor="t">
-            <a:spAutoFit/>
-          </a:bodyPr>
-          <a:lstStyle/>
-          <a:p>
-            <a:pPr algn="l"/>
-            <a:r>
-              <a:rPr sz="3600" b="0" dirty="0">
-                <a:solidFill>
-                  <a:srgbClr val="4C4F69"/>
-                </a:solidFill>
-                <a:latin typeface="Aptos"/>
-              </a:rPr>
-              <a:t>code </a:t>
-            </a:r>
-            <a:r>
-              <a:rPr lang="en-GB" sz="3600" b="1" dirty="0">
-                <a:solidFill>
-                  <a:srgbClr val="036D97"/>
-                </a:solidFill>
-                <a:latin typeface="Aptos"/>
-              </a:rPr>
-              <a:t>____ ____</a:t>
-            </a:r>
-          </a:p>
-        </p:txBody>
-      </p:sp>
-      <p:sp>
-        <p:nvSpPr>
-          <p:cNvPr id="6" name="TextBox 5"/>
-          <p:cNvSpPr txBox="1"/>
-          <p:nvPr/>
-        </p:nvSpPr>
-        <p:spPr>
-          <a:xfrm>
-            <a:off x="7254239" y="4434840"/>
-            <a:ext cx="3713873" cy="523220"/>
-          </a:xfrm>
-          <a:prstGeom prst="rect">
-            <a:avLst/>
-          </a:prstGeom>
-          <a:noFill/>
-        </p:spPr>
-        <p:txBody>
-          <a:bodyPr wrap="square" lIns="73152" rIns="73152" anchor="t">
-            <a:spAutoFit/>
-          </a:bodyPr>
-          <a:lstStyle/>
-          <a:p>
-            <a:pPr algn="l"/>
-            <a:r>
-              <a:rPr sz="2800" b="0">
-                <a:solidFill>
-                  <a:srgbClr val="4C4F69"/>
-                </a:solidFill>
-                <a:latin typeface="Aptos"/>
-              </a:rPr>
-              <a:t>One or two words each</a:t>
-            </a:r>
-          </a:p>
-        </p:txBody>
-      </p:sp>
       <p:pic>
         <p:nvPicPr>
           <p:cNvPr id="7" name="Picture 6"/>
@@ -15038,53 +14857,88 @@
       </p:pic>
       <p:sp>
         <p:nvSpPr>
-          <p:cNvPr id="8" name="Rounded Rectangle 7"/>
-          <p:cNvSpPr/>
+          <p:cNvPr id="8" name="TextBox 7"/>
+          <p:cNvSpPr txBox="1"/>
           <p:nvPr/>
         </p:nvSpPr>
         <p:spPr>
           <a:xfrm>
-            <a:off x="1589180" y="1699846"/>
-            <a:ext cx="4506820" cy="4506820"/>
+            <a:off x="914400" y="2011680"/>
+            <a:ext cx="10363200" cy="1463040"/>
           </a:xfrm>
-          <a:prstGeom prst="roundRect">
+          <a:prstGeom prst="rect">
             <a:avLst/>
           </a:prstGeom>
-          <a:solidFill>
-            <a:srgbClr val="EFF1F5"/>
-          </a:solidFill>
-          <a:ln w="25400">
-            <a:solidFill>
-              <a:srgbClr val="036D97"/>
-            </a:solidFill>
-            <a:prstDash val="dash"/>
-          </a:ln>
+          <a:noFill/>
         </p:spPr>
-        <p:style>
-          <a:lnRef idx="1">
-            <a:schemeClr val="accent1"/>
-          </a:lnRef>
-          <a:fillRef idx="3">
-            <a:schemeClr val="accent1"/>
-          </a:fillRef>
-          <a:effectRef idx="2">
-            <a:schemeClr val="accent1"/>
-          </a:effectRef>
-          <a:fontRef idx="minor">
-            <a:schemeClr val="lt1"/>
-          </a:fontRef>
-        </p:style>
-        <p:txBody>
-          <a:bodyPr rtlCol="0" anchor="ctr"/>
+        <p:txBody>
+          <a:bodyPr wrap="square" anchor="ctr">
+            <a:spAutoFit/>
+          </a:bodyPr>
           <a:lstStyle/>
           <a:p>
-            <a:r>
-              <a:rPr sz="2400">
-                <a:solidFill>
-                  <a:srgbClr val="036D97"/>
-                </a:solidFill>
-              </a:rPr>
-              <a:t>Paste your Menti QR code here</a:t>
+            <a:pPr algn="ctr"/>
+            <a:r>
+              <a:rPr sz="5400" b="1">
+                <a:solidFill>
+                  <a:srgbClr val="4C4F69"/>
+                </a:solidFill>
+                <a:latin typeface="Georgia"/>
+              </a:rPr>
+              <a:t>What do you </a:t>
+            </a:r>
+            <a:r>
+              <a:rPr sz="5400" b="1">
+                <a:solidFill>
+                  <a:srgbClr val="B24101"/>
+                </a:solidFill>
+                <a:latin typeface="Georgia"/>
+              </a:rPr>
+              <a:t>remember</a:t>
+            </a:r>
+            <a:r>
+              <a:rPr sz="5400" b="1">
+                <a:solidFill>
+                  <a:srgbClr val="4C4F69"/>
+                </a:solidFill>
+                <a:latin typeface="Georgia"/>
+              </a:rPr>
+              <a:t>?</a:t>
+            </a:r>
+          </a:p>
+        </p:txBody>
+      </p:sp>
+      <p:sp>
+        <p:nvSpPr>
+          <p:cNvPr id="9" name="TextBox 8"/>
+          <p:cNvSpPr txBox="1"/>
+          <p:nvPr/>
+        </p:nvSpPr>
+        <p:spPr>
+          <a:xfrm>
+            <a:off x="914400" y="3657600"/>
+            <a:ext cx="10363200" cy="822960"/>
+          </a:xfrm>
+          <a:prstGeom prst="rect">
+            <a:avLst/>
+          </a:prstGeom>
+          <a:noFill/>
+        </p:spPr>
+        <p:txBody>
+          <a:bodyPr wrap="square" anchor="ctr">
+            <a:spAutoFit/>
+          </a:bodyPr>
+          <a:lstStyle/>
+          <a:p>
+            <a:pPr algn="ctr"/>
+            <a:r>
+              <a:rPr sz="3200" b="0">
+                <a:solidFill>
+                  <a:srgbClr val="4C4F69"/>
+                </a:solidFill>
+                <a:latin typeface="Aptos"/>
+              </a:rPr>
+              <a:t>One or two words each</a:t>
             </a:r>
           </a:p>
         </p:txBody>

--- a/site/public/slides/tts-day1-death-by-powerpoint.pptx
+++ b/site/public/slides/tts-day1-death-by-powerpoint.pptx
@@ -758,81 +758,67 @@
           <a:lstStyle/>
           <a:p>
             <a:r>
-              <a:rPr dirty="0"/>
               <a:t>TIMING</a:t>
             </a:r>
           </a:p>
           <a:p>
             <a:r>
-              <a:rPr dirty="0"/>
               <a:t>  0:22–0:39 (15 min + 2 min swap)</a:t>
             </a:r>
           </a:p>
           <a:p>
             <a:r>
-              <a:rPr dirty="0"/>
               <a:t>SAY</a:t>
             </a:r>
           </a:p>
           <a:p>
             <a:r>
-              <a:rPr dirty="0"/>
-              <a:t>  One slide (yours, one from the pack, or one you find on the intranet), not the whole deck.</a:t>
-            </a:r>
-          </a:p>
-          <a:p>
-            <a:r>
-              <a:rPr dirty="0"/>
-              <a:t>  Then swap with a </a:t>
-            </a:r>
-            <a:r>
-              <a:rPr dirty="0" err="1"/>
-              <a:t>neighbour</a:t>
-            </a:r>
-            <a:r>
-              <a:rPr dirty="0"/>
-              <a:t> for 2 minutes: what did they cut?</a:t>
-            </a:r>
-          </a:p>
-          <a:p>
-            <a:r>
-              <a:rPr dirty="0"/>
-              <a:t>FALLBACK</a:t>
-            </a:r>
-          </a:p>
-          <a:p>
-            <a:r>
-              <a:rPr dirty="0"/>
-              <a:t>  No slide → the bad-slide pack. No device → redesign on paper (a storyboard counts).</a:t>
-            </a:r>
-          </a:p>
-          <a:p>
-            <a:r>
-              <a:rPr dirty="0"/>
-              <a:t>WATCH FOR</a:t>
-            </a:r>
-          </a:p>
-          <a:p>
-            <a:r>
-              <a:rPr dirty="0"/>
-              <a:t>  'My Trust template won't let me' → acknowledge; park it for 'Show us'.</a:t>
-            </a:r>
-          </a:p>
-          <a:p>
-            <a:r>
-              <a:rPr dirty="0"/>
+              <a:t>  Build one slide from the kit that helps a nurse do ONE thing before leaving the bedside. Choose your pieces, cut the noise, image + voice. Anything needed but not for the learner's eyes goes in the speaker-notes strip.</a:t>
+            </a:r>
+          </a:p>
+          <a:p>
+            <a:r>
+              <a:t>  Comfortable on a laptop? Do it in PowerPoint on a slide of your own instead. Same rules.</a:t>
+            </a:r>
+          </a:p>
+          <a:p>
+            <a:r>
+              <a:t>  Then 2 minutes swapping with a neighbour: what did they discard?</a:t>
+            </a:r>
+          </a:p>
+          <a:p>
+            <a:r>
+              <a:t>FACILITATOR</a:t>
+            </a:r>
+          </a:p>
+          <a:p>
+            <a:r>
+              <a:t>  Hand out the falls slide kit (pre-cut in envelopes saves 5 minutes): the frame, the pieces, scissors or Blu Tack.</a:t>
+            </a:r>
+          </a:p>
+          <a:p>
+            <a:r>
+              <a:t>  Laptop route only: show once on screen: select slides (Shift / Ctrl / Cmd-click), Duplicate slide, Undo, Designer off.</a:t>
+            </a:r>
+          </a:p>
+          <a:p>
+            <a:r>
+              <a:t>WHY</a:t>
+            </a:r>
+          </a:p>
+          <a:p>
+            <a:r>
+              <a:t>  Paper takes the computer out of the way: the decisions (what stays, what goes, how big, where) are the skill. Picking and arranging given parts is a completion task, which suits novices (Sweller). The discard pile is extraneous load you can point at.</a:t>
+            </a:r>
+          </a:p>
+          <a:p>
+            <a:r>
               <a:t>IF SHORT</a:t>
             </a:r>
           </a:p>
           <a:p>
             <a:r>
-              <a:rPr dirty="0"/>
-              <a:t>  Cut the swap, not the redesign.</a:t>
-            </a:r>
-          </a:p>
-          <a:p>
-            <a:r>
-              <a:t>FACILITATOR: expect basic PowerPoint gaps. Show once, on screen: Shift-click / Ctrl-click (Cmd-click on Mac) to select several slides, right-click → Duplicate slide, Ctrl/Cmd+Z to undo, and switch off Designer suggestions. Then go round the room.</a:t>
+              <a:t>  Cut the swap, not the build.</a:t>
             </a:r>
           </a:p>
         </p:txBody>
@@ -1307,38 +1293,52 @@
           <a:lstStyle/>
           <a:p>
             <a:r>
-              <a:rPr dirty="0"/>
               <a:t>TIMING</a:t>
             </a:r>
           </a:p>
           <a:p>
             <a:r>
-              <a:rPr dirty="0"/>
               <a:t>  0:44–0:59 (15 min)</a:t>
             </a:r>
           </a:p>
           <a:p>
             <a:r>
-              <a:rPr dirty="0"/>
               <a:t>SAY</a:t>
             </a:r>
           </a:p>
           <a:p>
             <a:r>
-              <a:rPr dirty="0"/>
-              <a:t>  Same slide. Review → Check Accessibility.</a:t>
-            </a:r>
-          </a:p>
-          <a:p>
-            <a:r>
-              <a:rPr dirty="0"/>
+              <a:t>  Same slide, accessibility pass. Swap pieces for size and contrast; no meaning by colour alone.</a:t>
+            </a:r>
+          </a:p>
+          <a:p>
+            <a:r>
+              <a:t>  Then HOLD IT UP across the room: can the back row read it?</a:t>
+            </a:r>
+          </a:p>
+          <a:p>
+            <a:r>
+              <a:t>  Laptop route: Review → Check Accessibility.</a:t>
+            </a:r>
+          </a:p>
+          <a:p>
+            <a:r>
+              <a:t>WHY</a:t>
+            </a:r>
+          </a:p>
+          <a:p>
+            <a:r>
+              <a:t>  The readability test becomes physical: they feel 24pt rather than being told it.</a:t>
+            </a:r>
+          </a:p>
+          <a:p>
+            <a:r>
               <a:t>FALLBACK</a:t>
             </a:r>
           </a:p>
           <a:p>
             <a:r>
-              <a:rPr dirty="0"/>
-              <a:t>  Paper: write size and contrast choices onto the storyboard.</a:t>
+              <a:t>  No laptops needed: this round is designed for paper.</a:t>
             </a:r>
           </a:p>
         </p:txBody>
@@ -8057,7 +8057,7 @@
                 </a:solidFill>
                 <a:latin typeface="Aptos"/>
               </a:rPr>
-              <a:t>Pick one slide</a:t>
+              <a:t>Pick your pieces</a:t>
             </a:r>
           </a:p>
         </p:txBody>
@@ -8275,7 +8275,7 @@
                 </a:solidFill>
                 <a:latin typeface="Aptos"/>
               </a:rPr>
-              <a:t>then 2 min swap with a </a:t>
+              <a:t>on paper (laptop if you're comfy) · </a:t>
             </a:r>
             <a:r>
               <a:rPr sz="3000" b="0" dirty="0" err="1">
@@ -8284,7 +8284,7 @@
                 </a:solidFill>
                 <a:latin typeface="Aptos"/>
               </a:rPr>
-              <a:t>neighbour</a:t>
+              <a:t>then swap</a:t>
             </a:r>
             <a:endParaRPr sz="3000" b="0" dirty="0">
               <a:solidFill>
@@ -10062,7 +10062,7 @@
                 </a:solidFill>
                 <a:latin typeface="Aptos"/>
               </a:rPr>
-              <a:t>Use</a:t>
+              <a:t>Hold it up!</a:t>
             </a:r>
             <a:r>
               <a:rPr sz="2800" b="1" dirty="0">
@@ -10071,7 +10071,7 @@
                 </a:solidFill>
                 <a:latin typeface="Aptos"/>
               </a:rPr>
-              <a:t> </a:t>
+              <a:t/>
             </a:r>
             <a:r>
               <a:rPr lang="en-GB" sz="2800" b="1" dirty="0">
@@ -10080,7 +10080,7 @@
                 </a:solidFill>
                 <a:latin typeface="Aptos"/>
               </a:rPr>
-              <a:t>accessibility </a:t>
+              <a:t/>
             </a:r>
             <a:r>
               <a:rPr sz="2800" b="1" dirty="0">
@@ -10089,7 +10089,7 @@
                 </a:solidFill>
                 <a:latin typeface="Aptos"/>
               </a:rPr>
-              <a:t>checker</a:t>
+              <a:t/>
             </a:r>
           </a:p>
         </p:txBody>
@@ -10151,7 +10151,7 @@
                 </a:solidFill>
                 <a:latin typeface="Aptos"/>
               </a:rPr>
-              <a:t>  same slide, accessibility pass</a:t>
+              <a:t>  same slide · laptop: run the accessibility checker</a:t>
             </a:r>
           </a:p>
         </p:txBody>
